--- a/MedPrice_презентация.pptx
+++ b/MedPrice_презентация.pptx
@@ -8898,7 +8898,7 @@
           <a:lstStyle/>
           <a:p>
             <a:r>
-              <a:t>Кейс 1 · MedServicePrice    |    Команда № ___</a:t>
+              <a:t>Кейс 1 · MedServicePrice    |    Команда № 73</a:t>
             </a:r>
           </a:p>
         </p:txBody>
